--- a/data/deep_dives/carteira_sumup_fidc_smart_iv_e_solo_itau_cf895b4d/exports/documentary_comparison.pptx
+++ b/data/deep_dives/carteira_sumup_fidc_smart_iv_e_solo_itau_cf895b4d/exports/documentary_comparison.pptx
@@ -4682,7 +4682,7 @@
                       <a:r>
                         <a:rPr sz="1300" b="1">
                           <a:solidFill>
-                            <a:srgbClr val="1F1F1F"/>
+                            <a:srgbClr val="FFFFFF"/>
                           </a:solidFill>
                           <a:latin typeface="Calibri"/>
                         </a:rPr>
@@ -4692,7 +4692,7 @@
                   </a:txBody>
                   <a:tcPr marL="91440" marR="91440" marT="41148" marB="41148" anchor="ctr">
                     <a:solidFill>
-                      <a:srgbClr val="EC7000"/>
+                      <a:srgbClr val="FF6200"/>
                     </a:solidFill>
                     <a:lnL>
                       <a:noFill/>
@@ -4731,7 +4731,7 @@
                       <a:r>
                         <a:rPr sz="1300" b="1">
                           <a:solidFill>
-                            <a:srgbClr val="1F1F1F"/>
+                            <a:srgbClr val="FFFFFF"/>
                           </a:solidFill>
                           <a:latin typeface="Calibri"/>
                         </a:rPr>
@@ -4741,7 +4741,7 @@
                   </a:txBody>
                   <a:tcPr marL="91440" marR="91440" marT="41148" marB="41148" anchor="ctr">
                     <a:solidFill>
-                      <a:srgbClr val="EC7000"/>
+                      <a:srgbClr val="FF6200"/>
                     </a:solidFill>
                     <a:lnL>
                       <a:noFill/>
@@ -4780,7 +4780,7 @@
                       <a:r>
                         <a:rPr sz="1300" b="1">
                           <a:solidFill>
-                            <a:srgbClr val="1F1F1F"/>
+                            <a:srgbClr val="FFFFFF"/>
                           </a:solidFill>
                           <a:latin typeface="Calibri"/>
                         </a:rPr>
@@ -4790,7 +4790,7 @@
                   </a:txBody>
                   <a:tcPr marL="91440" marR="91440" marT="41148" marB="41148" anchor="ctr">
                     <a:solidFill>
-                      <a:srgbClr val="EC7000"/>
+                      <a:srgbClr val="FF6200"/>
                     </a:solidFill>
                     <a:lnL>
                       <a:noFill/>
@@ -4882,7 +4882,7 @@
                           </a:solidFill>
                           <a:latin typeface="Calibri"/>
                         </a:rPr>
-                        <a:t>Não localizado na documentação acessível</a:t>
+                        <a:t>-</a:t>
                       </a:r>
                     </a:p>
                   </a:txBody>
@@ -4929,7 +4929,7 @@
                           </a:solidFill>
                           <a:latin typeface="Calibri"/>
                         </a:rPr>
-                        <a:t>Não localizado na documentação acessível</a:t>
+                        <a:t>-</a:t>
                       </a:r>
                     </a:p>
                   </a:txBody>
@@ -5025,7 +5025,7 @@
                           </a:solidFill>
                           <a:latin typeface="Calibri"/>
                         </a:rPr>
-                        <a:t>Não localizado na documentação acessível</a:t>
+                        <a:t>-</a:t>
                       </a:r>
                     </a:p>
                   </a:txBody>
@@ -5072,7 +5072,7 @@
                           </a:solidFill>
                           <a:latin typeface="Calibri"/>
                         </a:rPr>
-                        <a:t>Não localizado na documentação acessível</a:t>
+                        <a:t>-</a:t>
                       </a:r>
                     </a:p>
                   </a:txBody>
@@ -5168,7 +5168,7 @@
                           </a:solidFill>
                           <a:latin typeface="Calibri"/>
                         </a:rPr>
-                        <a:t>Não localizado na documentação acessível</a:t>
+                        <a:t>-</a:t>
                       </a:r>
                     </a:p>
                   </a:txBody>
@@ -5215,7 +5215,7 @@
                           </a:solidFill>
                           <a:latin typeface="Calibri"/>
                         </a:rPr>
-                        <a:t>Não localizado na documentação acessível</a:t>
+                        <a:t>-</a:t>
                       </a:r>
                     </a:p>
                   </a:txBody>
@@ -5311,7 +5311,7 @@
                           </a:solidFill>
                           <a:latin typeface="Calibri"/>
                         </a:rPr>
-                        <a:t>Não localizado na documentação acessível</a:t>
+                        <a:t>-</a:t>
                       </a:r>
                     </a:p>
                   </a:txBody>
@@ -5358,7 +5358,7 @@
                           </a:solidFill>
                           <a:latin typeface="Calibri"/>
                         </a:rPr>
-                        <a:t>Não localizado na documentação acessível</a:t>
+                        <a:t>-</a:t>
                       </a:r>
                     </a:p>
                   </a:txBody>
@@ -5454,7 +5454,7 @@
                           </a:solidFill>
                           <a:latin typeface="Calibri"/>
                         </a:rPr>
-                        <a:t>Não localizado na documentação acessível</a:t>
+                        <a:t>-</a:t>
                       </a:r>
                     </a:p>
                   </a:txBody>
@@ -5501,7 +5501,7 @@
                           </a:solidFill>
                           <a:latin typeface="Calibri"/>
                         </a:rPr>
-                        <a:t>Não localizado na documentação acessível</a:t>
+                        <a:t>-</a:t>
                       </a:r>
                     </a:p>
                   </a:txBody>
@@ -5597,7 +5597,7 @@
                           </a:solidFill>
                           <a:latin typeface="Calibri"/>
                         </a:rPr>
-                        <a:t>Não localizado na documentação acessível</a:t>
+                        <a:t>-</a:t>
                       </a:r>
                     </a:p>
                   </a:txBody>
@@ -5644,7 +5644,7 @@
                           </a:solidFill>
                           <a:latin typeface="Calibri"/>
                         </a:rPr>
-                        <a:t>Não localizado na documentação acessível</a:t>
+                        <a:t>-</a:t>
                       </a:r>
                     </a:p>
                   </a:txBody>
@@ -5740,7 +5740,7 @@
                           </a:solidFill>
                           <a:latin typeface="Calibri"/>
                         </a:rPr>
-                        <a:t>Não localizado na documentação acessível</a:t>
+                        <a:t>-</a:t>
                       </a:r>
                     </a:p>
                   </a:txBody>
@@ -5787,7 +5787,7 @@
                           </a:solidFill>
                           <a:latin typeface="Calibri"/>
                         </a:rPr>
-                        <a:t>Não localizado na documentação acessível</a:t>
+                        <a:t>-</a:t>
                       </a:r>
                     </a:p>
                   </a:txBody>
@@ -5885,7 +5885,7 @@
                           </a:solidFill>
                           <a:latin typeface="Calibri"/>
                         </a:rPr>
-                        <a:t>Não localizado na documentação acessível</a:t>
+                        <a:t>-</a:t>
                       </a:r>
                     </a:p>
                   </a:txBody>
@@ -5934,7 +5934,7 @@
                           </a:solidFill>
                           <a:latin typeface="Calibri"/>
                         </a:rPr>
-                        <a:t>Não localizado na documentação acessível</a:t>
+                        <a:t>-</a:t>
                       </a:r>
                     </a:p>
                   </a:txBody>
@@ -6104,7 +6104,7 @@
         </p:nvGraphicFramePr>
         <p:xfrm>
           <a:off x="438912" y="932688"/>
-          <a:ext cx="11313870" cy="3506724"/>
+          <a:ext cx="11313870" cy="3131820"/>
         </p:xfrm>
         <a:graphic>
           <a:graphicData uri="http://schemas.openxmlformats.org/drawingml/2006/table">
@@ -6139,7 +6139,7 @@
                       <a:r>
                         <a:rPr sz="1300" b="1">
                           <a:solidFill>
-                            <a:srgbClr val="1F1F1F"/>
+                            <a:srgbClr val="FFFFFF"/>
                           </a:solidFill>
                           <a:latin typeface="Calibri"/>
                         </a:rPr>
@@ -6149,7 +6149,7 @@
                   </a:txBody>
                   <a:tcPr marL="91440" marR="91440" marT="41148" marB="41148" anchor="ctr">
                     <a:solidFill>
-                      <a:srgbClr val="EC7000"/>
+                      <a:srgbClr val="FF6200"/>
                     </a:solidFill>
                     <a:lnL>
                       <a:noFill/>
@@ -6188,7 +6188,7 @@
                       <a:r>
                         <a:rPr sz="1300" b="1">
                           <a:solidFill>
-                            <a:srgbClr val="1F1F1F"/>
+                            <a:srgbClr val="FFFFFF"/>
                           </a:solidFill>
                           <a:latin typeface="Calibri"/>
                         </a:rPr>
@@ -6198,7 +6198,7 @@
                   </a:txBody>
                   <a:tcPr marL="91440" marR="91440" marT="41148" marB="41148" anchor="ctr">
                     <a:solidFill>
-                      <a:srgbClr val="EC7000"/>
+                      <a:srgbClr val="FF6200"/>
                     </a:solidFill>
                     <a:lnL>
                       <a:noFill/>
@@ -6237,7 +6237,7 @@
                       <a:r>
                         <a:rPr sz="1300" b="1">
                           <a:solidFill>
-                            <a:srgbClr val="1F1F1F"/>
+                            <a:srgbClr val="FFFFFF"/>
                           </a:solidFill>
                           <a:latin typeface="Calibri"/>
                         </a:rPr>
@@ -6247,7 +6247,7 @@
                   </a:txBody>
                   <a:tcPr marL="91440" marR="91440" marT="41148" marB="41148" anchor="ctr">
                     <a:solidFill>
-                      <a:srgbClr val="EC7000"/>
+                      <a:srgbClr val="FF6200"/>
                     </a:solidFill>
                     <a:lnL>
                       <a:noFill/>
@@ -6339,7 +6339,7 @@
                           </a:solidFill>
                           <a:latin typeface="Calibri"/>
                         </a:rPr>
-                        <a:t>Não localizado na documentação acessível</a:t>
+                        <a:t>-</a:t>
                       </a:r>
                     </a:p>
                   </a:txBody>
@@ -6386,7 +6386,7 @@
                           </a:solidFill>
                           <a:latin typeface="Calibri"/>
                         </a:rPr>
-                        <a:t>Não localizado na documentação acessível</a:t>
+                        <a:t>-</a:t>
                       </a:r>
                     </a:p>
                   </a:txBody>
@@ -6504,9 +6504,34 @@
                           </a:solidFill>
                           <a:latin typeface="Calibri"/>
                         </a:rPr>
-                        <a:t>Não localizado na documentação acessível; Não</a:t>
-                      </a:r>
-                    </a:p>
+                        <a:t>-</a:t>
+                      </a:r>
+                    </a:p>
+                  </a:txBody>
+                  <a:tcPr marL="91440" marR="91440" marT="41148" marB="41148" anchor="ctr">
+                    <a:solidFill>
+                      <a:srgbClr val="FFFFFF"/>
+                    </a:solidFill>
+                    <a:lnL>
+                      <a:noFill/>
+                    </a:lnL>
+                    <a:lnR>
+                      <a:noFill/>
+                    </a:lnR>
+                    <a:lnT>
+                      <a:noFill/>
+                    </a:lnT>
+                    <a:lnB>
+                      <a:noFill/>
+                    </a:lnB>
+                  </a:tcPr>
+                </a:tc>
+                <a:tc>
+                  <a:txBody>
+                    <a:bodyPr wrap="square">
+                      <a:noAutofit/>
+                    </a:bodyPr>
+                    <a:lstStyle/>
                     <a:p>
                       <a:pPr algn="ctr">
                         <a:lnSpc>
@@ -6526,76 +6551,7 @@
                           </a:solidFill>
                           <a:latin typeface="Calibri"/>
                         </a:rPr>
-                        <a:t>localizado na documentação acessível</a:t>
-                      </a:r>
-                    </a:p>
-                  </a:txBody>
-                  <a:tcPr marL="91440" marR="91440" marT="41148" marB="41148" anchor="ctr">
-                    <a:solidFill>
-                      <a:srgbClr val="FFFFFF"/>
-                    </a:solidFill>
-                    <a:lnL>
-                      <a:noFill/>
-                    </a:lnL>
-                    <a:lnR>
-                      <a:noFill/>
-                    </a:lnR>
-                    <a:lnT>
-                      <a:noFill/>
-                    </a:lnT>
-                    <a:lnB>
-                      <a:noFill/>
-                    </a:lnB>
-                  </a:tcPr>
-                </a:tc>
-                <a:tc>
-                  <a:txBody>
-                    <a:bodyPr wrap="square">
-                      <a:noAutofit/>
-                    </a:bodyPr>
-                    <a:lstStyle/>
-                    <a:p>
-                      <a:pPr algn="ctr">
-                        <a:lnSpc>
-                          <a:spcPct val="100000"/>
-                        </a:lnSpc>
-                        <a:spcBef>
-                          <a:spcPts val="0"/>
-                        </a:spcBef>
-                        <a:spcAft>
-                          <a:spcPts val="0"/>
-                        </a:spcAft>
-                      </a:pPr>
-                      <a:r>
-                        <a:rPr sz="1300" b="0">
-                          <a:solidFill>
-                            <a:srgbClr val="1F1F1F"/>
-                          </a:solidFill>
-                          <a:latin typeface="Calibri"/>
-                        </a:rPr>
-                        <a:t>Não localizado na documentação acessível; Não</a:t>
-                      </a:r>
-                    </a:p>
-                    <a:p>
-                      <a:pPr algn="ctr">
-                        <a:lnSpc>
-                          <a:spcPct val="100000"/>
-                        </a:lnSpc>
-                        <a:spcBef>
-                          <a:spcPts val="0"/>
-                        </a:spcBef>
-                        <a:spcAft>
-                          <a:spcPts val="0"/>
-                        </a:spcAft>
-                      </a:pPr>
-                      <a:r>
-                        <a:rPr sz="1300" b="0">
-                          <a:solidFill>
-                            <a:srgbClr val="1F1F1F"/>
-                          </a:solidFill>
-                          <a:latin typeface="Calibri"/>
-                        </a:rPr>
-                        <a:t>localizado na documentação acessível</a:t>
+                        <a:t>-</a:t>
                       </a:r>
                     </a:p>
                   </a:txBody>
@@ -6691,7 +6647,7 @@
                           </a:solidFill>
                           <a:latin typeface="Calibri"/>
                         </a:rPr>
-                        <a:t>Não localizado na documentação acessível</a:t>
+                        <a:t>-</a:t>
                       </a:r>
                     </a:p>
                   </a:txBody>
@@ -6738,7 +6694,7 @@
                           </a:solidFill>
                           <a:latin typeface="Calibri"/>
                         </a:rPr>
-                        <a:t>Não localizado na documentação acessível</a:t>
+                        <a:t>-</a:t>
                       </a:r>
                     </a:p>
                   </a:txBody>
@@ -6834,7 +6790,7 @@
                           </a:solidFill>
                           <a:latin typeface="Calibri"/>
                         </a:rPr>
-                        <a:t>Não localizado na documentação acessível</a:t>
+                        <a:t>-</a:t>
                       </a:r>
                     </a:p>
                   </a:txBody>
@@ -6881,238 +6837,7 @@
                           </a:solidFill>
                           <a:latin typeface="Calibri"/>
                         </a:rPr>
-                        <a:t>Não localizado na documentação acessível</a:t>
-                      </a:r>
-                    </a:p>
-                  </a:txBody>
-                  <a:tcPr marL="91440" marR="91440" marT="41148" marB="41148" anchor="ctr">
-                    <a:solidFill>
-                      <a:srgbClr val="FFFFFF"/>
-                    </a:solidFill>
-                    <a:lnL>
-                      <a:noFill/>
-                    </a:lnL>
-                    <a:lnR>
-                      <a:noFill/>
-                    </a:lnR>
-                    <a:lnT>
-                      <a:noFill/>
-                    </a:lnT>
-                    <a:lnB>
-                      <a:noFill/>
-                    </a:lnB>
-                  </a:tcPr>
-                </a:tc>
-              </a:tr>
-              <a:tr h="658368">
-                <a:tc>
-                  <a:txBody>
-                    <a:bodyPr wrap="square">
-                      <a:noAutofit/>
-                    </a:bodyPr>
-                    <a:lstStyle/>
-                    <a:p>
-                      <a:pPr algn="l">
-                        <a:lnSpc>
-                          <a:spcPct val="100000"/>
-                        </a:lnSpc>
-                        <a:spcBef>
-                          <a:spcPts val="0"/>
-                        </a:spcBef>
-                        <a:spcAft>
-                          <a:spcPts val="0"/>
-                        </a:spcAft>
-                      </a:pPr>
-                      <a:r>
-                        <a:rPr sz="1300" b="1">
-                          <a:solidFill>
-                            <a:srgbClr val="1F1F1F"/>
-                          </a:solidFill>
-                          <a:latin typeface="Calibri"/>
-                        </a:rPr>
-                        <a:t>PDD</a:t>
-                      </a:r>
-                    </a:p>
-                  </a:txBody>
-                  <a:tcPr marL="91440" marR="91440" marT="41148" marB="41148" anchor="ctr">
-                    <a:solidFill>
-                      <a:srgbClr val="FFFFFF"/>
-                    </a:solidFill>
-                    <a:lnL>
-                      <a:noFill/>
-                    </a:lnL>
-                    <a:lnR>
-                      <a:noFill/>
-                    </a:lnR>
-                    <a:lnT>
-                      <a:noFill/>
-                    </a:lnT>
-                    <a:lnB>
-                      <a:noFill/>
-                    </a:lnB>
-                  </a:tcPr>
-                </a:tc>
-                <a:tc>
-                  <a:txBody>
-                    <a:bodyPr wrap="square">
-                      <a:noAutofit/>
-                    </a:bodyPr>
-                    <a:lstStyle/>
-                    <a:p>
-                      <a:pPr algn="ctr">
-                        <a:lnSpc>
-                          <a:spcPct val="100000"/>
-                        </a:lnSpc>
-                        <a:spcBef>
-                          <a:spcPts val="0"/>
-                        </a:spcBef>
-                        <a:spcAft>
-                          <a:spcPts val="0"/>
-                        </a:spcAft>
-                      </a:pPr>
-                      <a:r>
-                        <a:rPr sz="1300" b="0">
-                          <a:solidFill>
-                            <a:srgbClr val="1F1F1F"/>
-                          </a:solidFill>
-                          <a:latin typeface="Calibri"/>
-                        </a:rPr>
-                        <a:t>Gatilho contratual específico de PDD não</a:t>
-                      </a:r>
-                    </a:p>
-                    <a:p>
-                      <a:pPr algn="ctr">
-                        <a:lnSpc>
-                          <a:spcPct val="100000"/>
-                        </a:lnSpc>
-                        <a:spcBef>
-                          <a:spcPts val="0"/>
-                        </a:spcBef>
-                        <a:spcAft>
-                          <a:spcPts val="0"/>
-                        </a:spcAft>
-                      </a:pPr>
-                      <a:r>
-                        <a:rPr sz="1300" b="0">
-                          <a:solidFill>
-                            <a:srgbClr val="1F1F1F"/>
-                          </a:solidFill>
-                          <a:latin typeface="Calibri"/>
-                        </a:rPr>
-                        <a:t>localizado; usar PDD/crédito como indicador</a:t>
-                      </a:r>
-                    </a:p>
-                    <a:p>
-                      <a:pPr algn="ctr">
-                        <a:lnSpc>
-                          <a:spcPct val="100000"/>
-                        </a:lnSpc>
-                        <a:spcBef>
-                          <a:spcPts val="0"/>
-                        </a:spcBef>
-                        <a:spcAft>
-                          <a:spcPts val="0"/>
-                        </a:spcAft>
-                      </a:pPr>
-                      <a:r>
-                        <a:rPr sz="1300" b="0">
-                          <a:solidFill>
-                            <a:srgbClr val="1F1F1F"/>
-                          </a:solidFill>
-                          <a:latin typeface="Calibri"/>
-                        </a:rPr>
-                        <a:t>agregado</a:t>
-                      </a:r>
-                    </a:p>
-                  </a:txBody>
-                  <a:tcPr marL="91440" marR="91440" marT="41148" marB="41148" anchor="ctr">
-                    <a:solidFill>
-                      <a:srgbClr val="FFFFFF"/>
-                    </a:solidFill>
-                    <a:lnL>
-                      <a:noFill/>
-                    </a:lnL>
-                    <a:lnR>
-                      <a:noFill/>
-                    </a:lnR>
-                    <a:lnT>
-                      <a:noFill/>
-                    </a:lnT>
-                    <a:lnB>
-                      <a:noFill/>
-                    </a:lnB>
-                  </a:tcPr>
-                </a:tc>
-                <a:tc>
-                  <a:txBody>
-                    <a:bodyPr wrap="square">
-                      <a:noAutofit/>
-                    </a:bodyPr>
-                    <a:lstStyle/>
-                    <a:p>
-                      <a:pPr algn="ctr">
-                        <a:lnSpc>
-                          <a:spcPct val="100000"/>
-                        </a:lnSpc>
-                        <a:spcBef>
-                          <a:spcPts val="0"/>
-                        </a:spcBef>
-                        <a:spcAft>
-                          <a:spcPts val="0"/>
-                        </a:spcAft>
-                      </a:pPr>
-                      <a:r>
-                        <a:rPr sz="1300" b="0">
-                          <a:solidFill>
-                            <a:srgbClr val="1F1F1F"/>
-                          </a:solidFill>
-                          <a:latin typeface="Calibri"/>
-                        </a:rPr>
-                        <a:t>Gatilho contratual específico de PDD não</a:t>
-                      </a:r>
-                    </a:p>
-                    <a:p>
-                      <a:pPr algn="ctr">
-                        <a:lnSpc>
-                          <a:spcPct val="100000"/>
-                        </a:lnSpc>
-                        <a:spcBef>
-                          <a:spcPts val="0"/>
-                        </a:spcBef>
-                        <a:spcAft>
-                          <a:spcPts val="0"/>
-                        </a:spcAft>
-                      </a:pPr>
-                      <a:r>
-                        <a:rPr sz="1300" b="0">
-                          <a:solidFill>
-                            <a:srgbClr val="1F1F1F"/>
-                          </a:solidFill>
-                          <a:latin typeface="Calibri"/>
-                        </a:rPr>
-                        <a:t>localizado; usar PDD/crédito como indicador</a:t>
-                      </a:r>
-                    </a:p>
-                    <a:p>
-                      <a:pPr algn="ctr">
-                        <a:lnSpc>
-                          <a:spcPct val="100000"/>
-                        </a:lnSpc>
-                        <a:spcBef>
-                          <a:spcPts val="0"/>
-                        </a:spcBef>
-                        <a:spcAft>
-                          <a:spcPts val="0"/>
-                        </a:spcAft>
-                      </a:pPr>
-                      <a:r>
-                        <a:rPr sz="1300" b="0">
-                          <a:solidFill>
-                            <a:srgbClr val="1F1F1F"/>
-                          </a:solidFill>
-                          <a:latin typeface="Calibri"/>
-                        </a:rPr>
-                        <a:t>agregado</a:t>
+                        <a:t>-</a:t>
                       </a:r>
                     </a:p>
                   </a:txBody>
@@ -7161,7 +6886,7 @@
                           </a:solidFill>
                           <a:latin typeface="Calibri"/>
                         </a:rPr>
-                        <a:t>Subordinação mezanino</a:t>
+                        <a:t>PDD</a:t>
                       </a:r>
                     </a:p>
                   </a:txBody>
@@ -7208,7 +6933,7 @@
                           </a:solidFill>
                           <a:latin typeface="Calibri"/>
                         </a:rPr>
-                        <a:t>Não localizado na documentação acessível</a:t>
+                        <a:t>usar PDD/crédito como indicador agregado</a:t>
                       </a:r>
                     </a:p>
                   </a:txBody>
@@ -7255,7 +6980,7 @@
                           </a:solidFill>
                           <a:latin typeface="Calibri"/>
                         </a:rPr>
-                        <a:t>Não localizado na documentação acessível</a:t>
+                        <a:t>usar PDD/crédito como indicador agregado</a:t>
                       </a:r>
                     </a:p>
                   </a:txBody>
@@ -7304,7 +7029,7 @@
                           </a:solidFill>
                           <a:latin typeface="Calibri"/>
                         </a:rPr>
-                        <a:t>Eventos de avaliação</a:t>
+                        <a:t>Subordinação mezanino</a:t>
                       </a:r>
                     </a:p>
                   </a:txBody>
@@ -7351,7 +7076,7 @@
                           </a:solidFill>
                           <a:latin typeface="Calibri"/>
                         </a:rPr>
-                        <a:t>Não localizado na documentação acessível</a:t>
+                        <a:t>-</a:t>
                       </a:r>
                     </a:p>
                   </a:txBody>
@@ -7398,7 +7123,7 @@
                           </a:solidFill>
                           <a:latin typeface="Calibri"/>
                         </a:rPr>
-                        <a:t>Não localizado na documentação acessível</a:t>
+                        <a:t>-</a:t>
                       </a:r>
                     </a:p>
                   </a:txBody>
@@ -7447,6 +7172,149 @@
                           </a:solidFill>
                           <a:latin typeface="Calibri"/>
                         </a:rPr>
+                        <a:t>Eventos de avaliação</a:t>
+                      </a:r>
+                    </a:p>
+                  </a:txBody>
+                  <a:tcPr marL="91440" marR="91440" marT="41148" marB="41148" anchor="ctr">
+                    <a:solidFill>
+                      <a:srgbClr val="FFFFFF"/>
+                    </a:solidFill>
+                    <a:lnL>
+                      <a:noFill/>
+                    </a:lnL>
+                    <a:lnR>
+                      <a:noFill/>
+                    </a:lnR>
+                    <a:lnT>
+                      <a:noFill/>
+                    </a:lnT>
+                    <a:lnB>
+                      <a:noFill/>
+                    </a:lnB>
+                  </a:tcPr>
+                </a:tc>
+                <a:tc>
+                  <a:txBody>
+                    <a:bodyPr wrap="square">
+                      <a:noAutofit/>
+                    </a:bodyPr>
+                    <a:lstStyle/>
+                    <a:p>
+                      <a:pPr algn="ctr">
+                        <a:lnSpc>
+                          <a:spcPct val="100000"/>
+                        </a:lnSpc>
+                        <a:spcBef>
+                          <a:spcPts val="0"/>
+                        </a:spcBef>
+                        <a:spcAft>
+                          <a:spcPts val="0"/>
+                        </a:spcAft>
+                      </a:pPr>
+                      <a:r>
+                        <a:rPr sz="1300" b="0">
+                          <a:solidFill>
+                            <a:srgbClr val="1F1F1F"/>
+                          </a:solidFill>
+                          <a:latin typeface="Calibri"/>
+                        </a:rPr>
+                        <a:t>-</a:t>
+                      </a:r>
+                    </a:p>
+                  </a:txBody>
+                  <a:tcPr marL="91440" marR="91440" marT="41148" marB="41148" anchor="ctr">
+                    <a:solidFill>
+                      <a:srgbClr val="FFFFFF"/>
+                    </a:solidFill>
+                    <a:lnL>
+                      <a:noFill/>
+                    </a:lnL>
+                    <a:lnR>
+                      <a:noFill/>
+                    </a:lnR>
+                    <a:lnT>
+                      <a:noFill/>
+                    </a:lnT>
+                    <a:lnB>
+                      <a:noFill/>
+                    </a:lnB>
+                  </a:tcPr>
+                </a:tc>
+                <a:tc>
+                  <a:txBody>
+                    <a:bodyPr wrap="square">
+                      <a:noAutofit/>
+                    </a:bodyPr>
+                    <a:lstStyle/>
+                    <a:p>
+                      <a:pPr algn="ctr">
+                        <a:lnSpc>
+                          <a:spcPct val="100000"/>
+                        </a:lnSpc>
+                        <a:spcBef>
+                          <a:spcPts val="0"/>
+                        </a:spcBef>
+                        <a:spcAft>
+                          <a:spcPts val="0"/>
+                        </a:spcAft>
+                      </a:pPr>
+                      <a:r>
+                        <a:rPr sz="1300" b="0">
+                          <a:solidFill>
+                            <a:srgbClr val="1F1F1F"/>
+                          </a:solidFill>
+                          <a:latin typeface="Calibri"/>
+                        </a:rPr>
+                        <a:t>-</a:t>
+                      </a:r>
+                    </a:p>
+                  </a:txBody>
+                  <a:tcPr marL="91440" marR="91440" marT="41148" marB="41148" anchor="ctr">
+                    <a:solidFill>
+                      <a:srgbClr val="FFFFFF"/>
+                    </a:solidFill>
+                    <a:lnL>
+                      <a:noFill/>
+                    </a:lnL>
+                    <a:lnR>
+                      <a:noFill/>
+                    </a:lnR>
+                    <a:lnT>
+                      <a:noFill/>
+                    </a:lnT>
+                    <a:lnB>
+                      <a:noFill/>
+                    </a:lnB>
+                  </a:tcPr>
+                </a:tc>
+              </a:tr>
+              <a:tr h="283464">
+                <a:tc>
+                  <a:txBody>
+                    <a:bodyPr wrap="square">
+                      <a:noAutofit/>
+                    </a:bodyPr>
+                    <a:lstStyle/>
+                    <a:p>
+                      <a:pPr algn="l">
+                        <a:lnSpc>
+                          <a:spcPct val="100000"/>
+                        </a:lnSpc>
+                        <a:spcBef>
+                          <a:spcPts val="0"/>
+                        </a:spcBef>
+                        <a:spcAft>
+                          <a:spcPts val="0"/>
+                        </a:spcAft>
+                      </a:pPr>
+                      <a:r>
+                        <a:rPr sz="1300" b="1">
+                          <a:solidFill>
+                            <a:srgbClr val="1F1F1F"/>
+                          </a:solidFill>
+                          <a:latin typeface="Calibri"/>
+                        </a:rPr>
                         <a:t>Liquidação antecipada</a:t>
                       </a:r>
                     </a:p>
@@ -7494,7 +7362,7 @@
                           </a:solidFill>
                           <a:latin typeface="Calibri"/>
                         </a:rPr>
-                        <a:t>Não localizado na documentação acessível</a:t>
+                        <a:t>-</a:t>
                       </a:r>
                     </a:p>
                   </a:txBody>
@@ -7541,7 +7409,7 @@
                           </a:solidFill>
                           <a:latin typeface="Calibri"/>
                         </a:rPr>
-                        <a:t>Não localizado na documentação acessível</a:t>
+                        <a:t>-</a:t>
                       </a:r>
                     </a:p>
                   </a:txBody>
@@ -7639,7 +7507,7 @@
                           </a:solidFill>
                           <a:latin typeface="Calibri"/>
                         </a:rPr>
-                        <a:t>Não localizado na documentação acessível</a:t>
+                        <a:t>-</a:t>
                       </a:r>
                     </a:p>
                   </a:txBody>
@@ -7688,7 +7556,7 @@
                           </a:solidFill>
                           <a:latin typeface="Calibri"/>
                         </a:rPr>
-                        <a:t>Não localizado na documentação acessível</a:t>
+                        <a:t>-</a:t>
                       </a:r>
                     </a:p>
                   </a:txBody>
@@ -7893,7 +7761,7 @@
                       <a:r>
                         <a:rPr sz="1300" b="1">
                           <a:solidFill>
-                            <a:srgbClr val="1F1F1F"/>
+                            <a:srgbClr val="FFFFFF"/>
                           </a:solidFill>
                           <a:latin typeface="Calibri"/>
                         </a:rPr>
@@ -7903,7 +7771,7 @@
                   </a:txBody>
                   <a:tcPr marL="91440" marR="91440" marT="41148" marB="41148" anchor="ctr">
                     <a:solidFill>
-                      <a:srgbClr val="EC7000"/>
+                      <a:srgbClr val="FF6200"/>
                     </a:solidFill>
                     <a:lnL>
                       <a:noFill/>
@@ -7942,7 +7810,7 @@
                       <a:r>
                         <a:rPr sz="1300" b="1">
                           <a:solidFill>
-                            <a:srgbClr val="1F1F1F"/>
+                            <a:srgbClr val="FFFFFF"/>
                           </a:solidFill>
                           <a:latin typeface="Calibri"/>
                         </a:rPr>
@@ -7952,7 +7820,7 @@
                   </a:txBody>
                   <a:tcPr marL="91440" marR="91440" marT="41148" marB="41148" anchor="ctr">
                     <a:solidFill>
-                      <a:srgbClr val="EC7000"/>
+                      <a:srgbClr val="FF6200"/>
                     </a:solidFill>
                     <a:lnL>
                       <a:noFill/>
@@ -7991,7 +7859,7 @@
                       <a:r>
                         <a:rPr sz="1300" b="1">
                           <a:solidFill>
-                            <a:srgbClr val="1F1F1F"/>
+                            <a:srgbClr val="FFFFFF"/>
                           </a:solidFill>
                           <a:latin typeface="Calibri"/>
                         </a:rPr>
@@ -8001,7 +7869,7 @@
                   </a:txBody>
                   <a:tcPr marL="91440" marR="91440" marT="41148" marB="41148" anchor="ctr">
                     <a:solidFill>
-                      <a:srgbClr val="EC7000"/>
+                      <a:srgbClr val="FF6200"/>
                     </a:solidFill>
                     <a:lnL>
                       <a:noFill/>
@@ -8093,7 +7961,7 @@
                           </a:solidFill>
                           <a:latin typeface="Calibri"/>
                         </a:rPr>
-                        <a:t>Não localizado na documentação acessível</a:t>
+                        <a:t>-</a:t>
                       </a:r>
                     </a:p>
                   </a:txBody>
@@ -8140,7 +8008,7 @@
                           </a:solidFill>
                           <a:latin typeface="Calibri"/>
                         </a:rPr>
-                        <a:t>Não localizado na documentação acessível</a:t>
+                        <a:t>-</a:t>
                       </a:r>
                     </a:p>
                   </a:txBody>
@@ -8236,7 +8104,7 @@
                           </a:solidFill>
                           <a:latin typeface="Calibri"/>
                         </a:rPr>
-                        <a:t>Não localizado na documentação acessível</a:t>
+                        <a:t>-</a:t>
                       </a:r>
                     </a:p>
                   </a:txBody>
@@ -8283,7 +8151,7 @@
                           </a:solidFill>
                           <a:latin typeface="Calibri"/>
                         </a:rPr>
-                        <a:t>Não localizado na documentação acessível</a:t>
+                        <a:t>-</a:t>
                       </a:r>
                     </a:p>
                   </a:txBody>
@@ -8379,7 +8247,7 @@
                           </a:solidFill>
                           <a:latin typeface="Calibri"/>
                         </a:rPr>
-                        <a:t>Não localizado na documentação acessível</a:t>
+                        <a:t>-</a:t>
                       </a:r>
                     </a:p>
                   </a:txBody>
@@ -8426,7 +8294,7 @@
                           </a:solidFill>
                           <a:latin typeface="Calibri"/>
                         </a:rPr>
-                        <a:t>Não localizado na documentação acessível</a:t>
+                        <a:t>-</a:t>
                       </a:r>
                     </a:p>
                   </a:txBody>
@@ -8522,7 +8390,7 @@
                           </a:solidFill>
                           <a:latin typeface="Calibri"/>
                         </a:rPr>
-                        <a:t>Não localizado na documentação acessível</a:t>
+                        <a:t>-</a:t>
                       </a:r>
                     </a:p>
                   </a:txBody>
@@ -8569,7 +8437,7 @@
                           </a:solidFill>
                           <a:latin typeface="Calibri"/>
                         </a:rPr>
-                        <a:t>Não localizado na documentação acessível</a:t>
+                        <a:t>-</a:t>
                       </a:r>
                     </a:p>
                   </a:txBody>
@@ -8665,7 +8533,7 @@
                           </a:solidFill>
                           <a:latin typeface="Calibri"/>
                         </a:rPr>
-                        <a:t>Não localizado na documentação acessível</a:t>
+                        <a:t>-</a:t>
                       </a:r>
                     </a:p>
                   </a:txBody>
@@ -8712,7 +8580,7 @@
                           </a:solidFill>
                           <a:latin typeface="Calibri"/>
                         </a:rPr>
-                        <a:t>Não localizado na documentação acessível</a:t>
+                        <a:t>-</a:t>
                       </a:r>
                     </a:p>
                   </a:txBody>
@@ -8808,7 +8676,7 @@
                           </a:solidFill>
                           <a:latin typeface="Calibri"/>
                         </a:rPr>
-                        <a:t>Não localizado na documentação acessível</a:t>
+                        <a:t>-</a:t>
                       </a:r>
                     </a:p>
                   </a:txBody>
@@ -8855,7 +8723,7 @@
                           </a:solidFill>
                           <a:latin typeface="Calibri"/>
                         </a:rPr>
-                        <a:t>Não localizado na documentação acessível</a:t>
+                        <a:t>-</a:t>
                       </a:r>
                     </a:p>
                   </a:txBody>
@@ -8953,7 +8821,7 @@
                           </a:solidFill>
                           <a:latin typeface="Calibri"/>
                         </a:rPr>
-                        <a:t>Não localizado na documentação acessível</a:t>
+                        <a:t>-</a:t>
                       </a:r>
                     </a:p>
                   </a:txBody>
@@ -9002,7 +8870,7 @@
                           </a:solidFill>
                           <a:latin typeface="Calibri"/>
                         </a:rPr>
-                        <a:t>Não localizado na documentação acessível</a:t>
+                        <a:t>-</a:t>
                       </a:r>
                     </a:p>
                   </a:txBody>
@@ -9172,7 +9040,7 @@
         </p:nvGraphicFramePr>
         <p:xfrm>
           <a:off x="438912" y="932688"/>
-          <a:ext cx="11313870" cy="3131820"/>
+          <a:ext cx="11313870" cy="2944368"/>
         </p:xfrm>
         <a:graphic>
           <a:graphicData uri="http://schemas.openxmlformats.org/drawingml/2006/table">
@@ -9207,7 +9075,7 @@
                       <a:r>
                         <a:rPr sz="1300" b="1">
                           <a:solidFill>
-                            <a:srgbClr val="1F1F1F"/>
+                            <a:srgbClr val="FFFFFF"/>
                           </a:solidFill>
                           <a:latin typeface="Calibri"/>
                         </a:rPr>
@@ -9217,7 +9085,7 @@
                   </a:txBody>
                   <a:tcPr marL="91440" marR="91440" marT="41148" marB="41148" anchor="ctr">
                     <a:solidFill>
-                      <a:srgbClr val="EC7000"/>
+                      <a:srgbClr val="FF6200"/>
                     </a:solidFill>
                     <a:lnL>
                       <a:noFill/>
@@ -9256,7 +9124,7 @@
                       <a:r>
                         <a:rPr sz="1300" b="1">
                           <a:solidFill>
-                            <a:srgbClr val="1F1F1F"/>
+                            <a:srgbClr val="FFFFFF"/>
                           </a:solidFill>
                           <a:latin typeface="Calibri"/>
                         </a:rPr>
@@ -9266,7 +9134,7 @@
                   </a:txBody>
                   <a:tcPr marL="91440" marR="91440" marT="41148" marB="41148" anchor="ctr">
                     <a:solidFill>
-                      <a:srgbClr val="EC7000"/>
+                      <a:srgbClr val="FF6200"/>
                     </a:solidFill>
                     <a:lnL>
                       <a:noFill/>
@@ -9305,7 +9173,7 @@
                       <a:r>
                         <a:rPr sz="1300" b="1">
                           <a:solidFill>
-                            <a:srgbClr val="1F1F1F"/>
+                            <a:srgbClr val="FFFFFF"/>
                           </a:solidFill>
                           <a:latin typeface="Calibri"/>
                         </a:rPr>
@@ -9315,7 +9183,7 @@
                   </a:txBody>
                   <a:tcPr marL="91440" marR="91440" marT="41148" marB="41148" anchor="ctr">
                     <a:solidFill>
-                      <a:srgbClr val="EC7000"/>
+                      <a:srgbClr val="FF6200"/>
                     </a:solidFill>
                     <a:lnL>
                       <a:noFill/>
@@ -9407,7 +9275,7 @@
                           </a:solidFill>
                           <a:latin typeface="Calibri"/>
                         </a:rPr>
-                        <a:t>Não localizado na documentação acessível</a:t>
+                        <a:t>-</a:t>
                       </a:r>
                     </a:p>
                   </a:txBody>
@@ -9454,7 +9322,7 @@
                           </a:solidFill>
                           <a:latin typeface="Calibri"/>
                         </a:rPr>
-                        <a:t>Não localizado na documentação acessível</a:t>
+                        <a:t>-</a:t>
                       </a:r>
                     </a:p>
                   </a:txBody>
@@ -9550,7 +9418,7 @@
                           </a:solidFill>
                           <a:latin typeface="Calibri"/>
                         </a:rPr>
-                        <a:t>Não localizado na documentação acessível</a:t>
+                        <a:t>-</a:t>
                       </a:r>
                     </a:p>
                   </a:txBody>
@@ -9597,194 +9465,7 @@
                           </a:solidFill>
                           <a:latin typeface="Calibri"/>
                         </a:rPr>
-                        <a:t>Não localizado na documentação acessível</a:t>
-                      </a:r>
-                    </a:p>
-                  </a:txBody>
-                  <a:tcPr marL="91440" marR="91440" marT="41148" marB="41148" anchor="ctr">
-                    <a:solidFill>
-                      <a:srgbClr val="FFFFFF"/>
-                    </a:solidFill>
-                    <a:lnL>
-                      <a:noFill/>
-                    </a:lnL>
-                    <a:lnR>
-                      <a:noFill/>
-                    </a:lnR>
-                    <a:lnT>
-                      <a:noFill/>
-                    </a:lnT>
-                    <a:lnB>
-                      <a:noFill/>
-                    </a:lnB>
-                  </a:tcPr>
-                </a:tc>
-              </a:tr>
-              <a:tr h="470916">
-                <a:tc>
-                  <a:txBody>
-                    <a:bodyPr wrap="square">
-                      <a:noAutofit/>
-                    </a:bodyPr>
-                    <a:lstStyle/>
-                    <a:p>
-                      <a:pPr algn="l">
-                        <a:lnSpc>
-                          <a:spcPct val="100000"/>
-                        </a:lnSpc>
-                        <a:spcBef>
-                          <a:spcPts val="0"/>
-                        </a:spcBef>
-                        <a:spcAft>
-                          <a:spcPts val="0"/>
-                        </a:spcAft>
-                      </a:pPr>
-                      <a:r>
-                        <a:rPr sz="1300" b="1">
-                          <a:solidFill>
-                            <a:srgbClr val="1F1F1F"/>
-                          </a:solidFill>
-                          <a:latin typeface="Calibri"/>
-                        </a:rPr>
-                        <a:t>Volume/VNU</a:t>
-                      </a:r>
-                    </a:p>
-                  </a:txBody>
-                  <a:tcPr marL="91440" marR="91440" marT="41148" marB="41148" anchor="ctr">
-                    <a:solidFill>
-                      <a:srgbClr val="FFFFFF"/>
-                    </a:solidFill>
-                    <a:lnL>
-                      <a:noFill/>
-                    </a:lnL>
-                    <a:lnR>
-                      <a:noFill/>
-                    </a:lnR>
-                    <a:lnT>
-                      <a:noFill/>
-                    </a:lnT>
-                    <a:lnB>
-                      <a:noFill/>
-                    </a:lnB>
-                  </a:tcPr>
-                </a:tc>
-                <a:tc>
-                  <a:txBody>
-                    <a:bodyPr wrap="square">
-                      <a:noAutofit/>
-                    </a:bodyPr>
-                    <a:lstStyle/>
-                    <a:p>
-                      <a:pPr algn="ctr">
-                        <a:lnSpc>
-                          <a:spcPct val="100000"/>
-                        </a:lnSpc>
-                        <a:spcBef>
-                          <a:spcPts val="0"/>
-                        </a:spcBef>
-                        <a:spcAft>
-                          <a:spcPts val="0"/>
-                        </a:spcAft>
-                      </a:pPr>
-                      <a:r>
-                        <a:rPr sz="1300" b="0">
-                          <a:solidFill>
-                            <a:srgbClr val="1F1F1F"/>
-                          </a:solidFill>
-                          <a:latin typeface="Calibri"/>
-                        </a:rPr>
-                        <a:t>Não localizado na documentação acessível; Não</a:t>
-                      </a:r>
-                    </a:p>
-                    <a:p>
-                      <a:pPr algn="ctr">
-                        <a:lnSpc>
-                          <a:spcPct val="100000"/>
-                        </a:lnSpc>
-                        <a:spcBef>
-                          <a:spcPts val="0"/>
-                        </a:spcBef>
-                        <a:spcAft>
-                          <a:spcPts val="0"/>
-                        </a:spcAft>
-                      </a:pPr>
-                      <a:r>
-                        <a:rPr sz="1300" b="0">
-                          <a:solidFill>
-                            <a:srgbClr val="1F1F1F"/>
-                          </a:solidFill>
-                          <a:latin typeface="Calibri"/>
-                        </a:rPr>
-                        <a:t>localizado na documentação acessível</a:t>
-                      </a:r>
-                    </a:p>
-                  </a:txBody>
-                  <a:tcPr marL="91440" marR="91440" marT="41148" marB="41148" anchor="ctr">
-                    <a:solidFill>
-                      <a:srgbClr val="FFFFFF"/>
-                    </a:solidFill>
-                    <a:lnL>
-                      <a:noFill/>
-                    </a:lnL>
-                    <a:lnR>
-                      <a:noFill/>
-                    </a:lnR>
-                    <a:lnT>
-                      <a:noFill/>
-                    </a:lnT>
-                    <a:lnB>
-                      <a:noFill/>
-                    </a:lnB>
-                  </a:tcPr>
-                </a:tc>
-                <a:tc>
-                  <a:txBody>
-                    <a:bodyPr wrap="square">
-                      <a:noAutofit/>
-                    </a:bodyPr>
-                    <a:lstStyle/>
-                    <a:p>
-                      <a:pPr algn="ctr">
-                        <a:lnSpc>
-                          <a:spcPct val="100000"/>
-                        </a:lnSpc>
-                        <a:spcBef>
-                          <a:spcPts val="0"/>
-                        </a:spcBef>
-                        <a:spcAft>
-                          <a:spcPts val="0"/>
-                        </a:spcAft>
-                      </a:pPr>
-                      <a:r>
-                        <a:rPr sz="1300" b="0">
-                          <a:solidFill>
-                            <a:srgbClr val="1F1F1F"/>
-                          </a:solidFill>
-                          <a:latin typeface="Calibri"/>
-                        </a:rPr>
-                        <a:t>Não localizado na documentação acessível; Não</a:t>
-                      </a:r>
-                    </a:p>
-                    <a:p>
-                      <a:pPr algn="ctr">
-                        <a:lnSpc>
-                          <a:spcPct val="100000"/>
-                        </a:lnSpc>
-                        <a:spcBef>
-                          <a:spcPts val="0"/>
-                        </a:spcBef>
-                        <a:spcAft>
-                          <a:spcPts val="0"/>
-                        </a:spcAft>
-                      </a:pPr>
-                      <a:r>
-                        <a:rPr sz="1300" b="0">
-                          <a:solidFill>
-                            <a:srgbClr val="1F1F1F"/>
-                          </a:solidFill>
-                          <a:latin typeface="Calibri"/>
-                        </a:rPr>
-                        <a:t>localizado na documentação acessível</a:t>
+                        <a:t>-</a:t>
                       </a:r>
                     </a:p>
                   </a:txBody>
@@ -9833,7 +9514,7 @@
                           </a:solidFill>
                           <a:latin typeface="Calibri"/>
                         </a:rPr>
-                        <a:t>Ofertas</a:t>
+                        <a:t>Volume/VNU</a:t>
                       </a:r>
                     </a:p>
                   </a:txBody>
@@ -9880,7 +9561,7 @@
                           </a:solidFill>
                           <a:latin typeface="Calibri"/>
                         </a:rPr>
-                        <a:t>Não localizado na documentação acessível</a:t>
+                        <a:t>-</a:t>
                       </a:r>
                     </a:p>
                   </a:txBody>
@@ -9927,7 +9608,7 @@
                           </a:solidFill>
                           <a:latin typeface="Calibri"/>
                         </a:rPr>
-                        <a:t>Não localizado na documentação acessível</a:t>
+                        <a:t>-</a:t>
                       </a:r>
                     </a:p>
                   </a:txBody>
@@ -9976,7 +9657,7 @@
                           </a:solidFill>
                           <a:latin typeface="Calibri"/>
                         </a:rPr>
-                        <a:t>Remuneração sênior</a:t>
+                        <a:t>Ofertas</a:t>
                       </a:r>
                     </a:p>
                   </a:txBody>
@@ -10023,7 +9704,7 @@
                           </a:solidFill>
                           <a:latin typeface="Calibri"/>
                         </a:rPr>
-                        <a:t>Não localizado na documentação acessível</a:t>
+                        <a:t>-</a:t>
                       </a:r>
                     </a:p>
                   </a:txBody>
@@ -10070,7 +9751,7 @@
                           </a:solidFill>
                           <a:latin typeface="Calibri"/>
                         </a:rPr>
-                        <a:t>Não localizado na documentação acessível</a:t>
+                        <a:t>-</a:t>
                       </a:r>
                     </a:p>
                   </a:txBody>
@@ -10119,7 +9800,7 @@
                           </a:solidFill>
                           <a:latin typeface="Calibri"/>
                         </a:rPr>
-                        <a:t>Remuneração mezanino</a:t>
+                        <a:t>Remuneração sênior</a:t>
                       </a:r>
                     </a:p>
                   </a:txBody>
@@ -10166,7 +9847,7 @@
                           </a:solidFill>
                           <a:latin typeface="Calibri"/>
                         </a:rPr>
-                        <a:t>Não localizado na documentação acessível</a:t>
+                        <a:t>-</a:t>
                       </a:r>
                     </a:p>
                   </a:txBody>
@@ -10213,7 +9894,7 @@
                           </a:solidFill>
                           <a:latin typeface="Calibri"/>
                         </a:rPr>
-                        <a:t>Não localizado na documentação acessível</a:t>
+                        <a:t>-</a:t>
                       </a:r>
                     </a:p>
                   </a:txBody>
@@ -10262,7 +9943,7 @@
                           </a:solidFill>
                           <a:latin typeface="Calibri"/>
                         </a:rPr>
-                        <a:t>Remuneração subordinada</a:t>
+                        <a:t>Remuneração mezanino</a:t>
                       </a:r>
                     </a:p>
                   </a:txBody>
@@ -10309,7 +9990,7 @@
                           </a:solidFill>
                           <a:latin typeface="Calibri"/>
                         </a:rPr>
-                        <a:t>Não localizado na documentação acessível</a:t>
+                        <a:t>-</a:t>
                       </a:r>
                     </a:p>
                   </a:txBody>
@@ -10356,7 +10037,7 @@
                           </a:solidFill>
                           <a:latin typeface="Calibri"/>
                         </a:rPr>
-                        <a:t>Não localizado na documentação acessível</a:t>
+                        <a:t>-</a:t>
                       </a:r>
                     </a:p>
                   </a:txBody>
@@ -10405,6 +10086,149 @@
                           </a:solidFill>
                           <a:latin typeface="Calibri"/>
                         </a:rPr>
+                        <a:t>Remuneração subordinada</a:t>
+                      </a:r>
+                    </a:p>
+                  </a:txBody>
+                  <a:tcPr marL="91440" marR="91440" marT="41148" marB="41148" anchor="ctr">
+                    <a:solidFill>
+                      <a:srgbClr val="FFFFFF"/>
+                    </a:solidFill>
+                    <a:lnL>
+                      <a:noFill/>
+                    </a:lnL>
+                    <a:lnR>
+                      <a:noFill/>
+                    </a:lnR>
+                    <a:lnT>
+                      <a:noFill/>
+                    </a:lnT>
+                    <a:lnB>
+                      <a:noFill/>
+                    </a:lnB>
+                  </a:tcPr>
+                </a:tc>
+                <a:tc>
+                  <a:txBody>
+                    <a:bodyPr wrap="square">
+                      <a:noAutofit/>
+                    </a:bodyPr>
+                    <a:lstStyle/>
+                    <a:p>
+                      <a:pPr algn="ctr">
+                        <a:lnSpc>
+                          <a:spcPct val="100000"/>
+                        </a:lnSpc>
+                        <a:spcBef>
+                          <a:spcPts val="0"/>
+                        </a:spcBef>
+                        <a:spcAft>
+                          <a:spcPts val="0"/>
+                        </a:spcAft>
+                      </a:pPr>
+                      <a:r>
+                        <a:rPr sz="1300" b="0">
+                          <a:solidFill>
+                            <a:srgbClr val="1F1F1F"/>
+                          </a:solidFill>
+                          <a:latin typeface="Calibri"/>
+                        </a:rPr>
+                        <a:t>-</a:t>
+                      </a:r>
+                    </a:p>
+                  </a:txBody>
+                  <a:tcPr marL="91440" marR="91440" marT="41148" marB="41148" anchor="ctr">
+                    <a:solidFill>
+                      <a:srgbClr val="FFFFFF"/>
+                    </a:solidFill>
+                    <a:lnL>
+                      <a:noFill/>
+                    </a:lnL>
+                    <a:lnR>
+                      <a:noFill/>
+                    </a:lnR>
+                    <a:lnT>
+                      <a:noFill/>
+                    </a:lnT>
+                    <a:lnB>
+                      <a:noFill/>
+                    </a:lnB>
+                  </a:tcPr>
+                </a:tc>
+                <a:tc>
+                  <a:txBody>
+                    <a:bodyPr wrap="square">
+                      <a:noAutofit/>
+                    </a:bodyPr>
+                    <a:lstStyle/>
+                    <a:p>
+                      <a:pPr algn="ctr">
+                        <a:lnSpc>
+                          <a:spcPct val="100000"/>
+                        </a:lnSpc>
+                        <a:spcBef>
+                          <a:spcPts val="0"/>
+                        </a:spcBef>
+                        <a:spcAft>
+                          <a:spcPts val="0"/>
+                        </a:spcAft>
+                      </a:pPr>
+                      <a:r>
+                        <a:rPr sz="1300" b="0">
+                          <a:solidFill>
+                            <a:srgbClr val="1F1F1F"/>
+                          </a:solidFill>
+                          <a:latin typeface="Calibri"/>
+                        </a:rPr>
+                        <a:t>-</a:t>
+                      </a:r>
+                    </a:p>
+                  </a:txBody>
+                  <a:tcPr marL="91440" marR="91440" marT="41148" marB="41148" anchor="ctr">
+                    <a:solidFill>
+                      <a:srgbClr val="FFFFFF"/>
+                    </a:solidFill>
+                    <a:lnL>
+                      <a:noFill/>
+                    </a:lnL>
+                    <a:lnR>
+                      <a:noFill/>
+                    </a:lnR>
+                    <a:lnT>
+                      <a:noFill/>
+                    </a:lnT>
+                    <a:lnB>
+                      <a:noFill/>
+                    </a:lnB>
+                  </a:tcPr>
+                </a:tc>
+              </a:tr>
+              <a:tr h="283464">
+                <a:tc>
+                  <a:txBody>
+                    <a:bodyPr wrap="square">
+                      <a:noAutofit/>
+                    </a:bodyPr>
+                    <a:lstStyle/>
+                    <a:p>
+                      <a:pPr algn="l">
+                        <a:lnSpc>
+                          <a:spcPct val="100000"/>
+                        </a:lnSpc>
+                        <a:spcBef>
+                          <a:spcPts val="0"/>
+                        </a:spcBef>
+                        <a:spcAft>
+                          <a:spcPts val="0"/>
+                        </a:spcAft>
+                      </a:pPr>
+                      <a:r>
+                        <a:rPr sz="1300" b="1">
+                          <a:solidFill>
+                            <a:srgbClr val="1F1F1F"/>
+                          </a:solidFill>
+                          <a:latin typeface="Calibri"/>
+                        </a:rPr>
                         <a:t>Volume / quantidade</a:t>
                       </a:r>
                     </a:p>
@@ -10452,7 +10276,7 @@
                           </a:solidFill>
                           <a:latin typeface="Calibri"/>
                         </a:rPr>
-                        <a:t>Não localizado na documentação acessível</a:t>
+                        <a:t>-</a:t>
                       </a:r>
                     </a:p>
                   </a:txBody>
@@ -10499,7 +10323,7 @@
                           </a:solidFill>
                           <a:latin typeface="Calibri"/>
                         </a:rPr>
-                        <a:t>Não localizado na documentação acessível</a:t>
+                        <a:t>-</a:t>
                       </a:r>
                     </a:p>
                   </a:txBody>
@@ -10597,7 +10421,7 @@
                           </a:solidFill>
                           <a:latin typeface="Calibri"/>
                         </a:rPr>
-                        <a:t>Não localizado na documentação acessível</a:t>
+                        <a:t>-</a:t>
                       </a:r>
                     </a:p>
                   </a:txBody>
@@ -10646,7 +10470,7 @@
                           </a:solidFill>
                           <a:latin typeface="Calibri"/>
                         </a:rPr>
-                        <a:t>Não localizado na documentação acessível</a:t>
+                        <a:t>-</a:t>
                       </a:r>
                     </a:p>
                   </a:txBody>
@@ -10816,7 +10640,7 @@
         </p:nvGraphicFramePr>
         <p:xfrm>
           <a:off x="438912" y="932688"/>
-          <a:ext cx="11313870" cy="2468880"/>
+          <a:ext cx="11313870" cy="2281428"/>
         </p:xfrm>
         <a:graphic>
           <a:graphicData uri="http://schemas.openxmlformats.org/drawingml/2006/table">
@@ -10851,7 +10675,7 @@
                       <a:r>
                         <a:rPr sz="1300" b="1">
                           <a:solidFill>
-                            <a:srgbClr val="1F1F1F"/>
+                            <a:srgbClr val="FFFFFF"/>
                           </a:solidFill>
                           <a:latin typeface="Calibri"/>
                         </a:rPr>
@@ -10861,7 +10685,7 @@
                   </a:txBody>
                   <a:tcPr marL="91440" marR="91440" marT="41148" marB="41148" anchor="ctr">
                     <a:solidFill>
-                      <a:srgbClr val="EC7000"/>
+                      <a:srgbClr val="FF6200"/>
                     </a:solidFill>
                     <a:lnL>
                       <a:noFill/>
@@ -10900,7 +10724,7 @@
                       <a:r>
                         <a:rPr sz="1300" b="1">
                           <a:solidFill>
-                            <a:srgbClr val="1F1F1F"/>
+                            <a:srgbClr val="FFFFFF"/>
                           </a:solidFill>
                           <a:latin typeface="Calibri"/>
                         </a:rPr>
@@ -10910,7 +10734,7 @@
                   </a:txBody>
                   <a:tcPr marL="91440" marR="91440" marT="41148" marB="41148" anchor="ctr">
                     <a:solidFill>
-                      <a:srgbClr val="EC7000"/>
+                      <a:srgbClr val="FF6200"/>
                     </a:solidFill>
                     <a:lnL>
                       <a:noFill/>
@@ -10949,7 +10773,7 @@
                       <a:r>
                         <a:rPr sz="1300" b="1">
                           <a:solidFill>
-                            <a:srgbClr val="1F1F1F"/>
+                            <a:srgbClr val="FFFFFF"/>
                           </a:solidFill>
                           <a:latin typeface="Calibri"/>
                         </a:rPr>
@@ -10959,7 +10783,7 @@
                   </a:txBody>
                   <a:tcPr marL="91440" marR="91440" marT="41148" marB="41148" anchor="ctr">
                     <a:solidFill>
-                      <a:srgbClr val="EC7000"/>
+                      <a:srgbClr val="FF6200"/>
                     </a:solidFill>
                     <a:lnL>
                       <a:noFill/>
@@ -11051,7 +10875,7 @@
                           </a:solidFill>
                           <a:latin typeface="Calibri"/>
                         </a:rPr>
-                        <a:t>Não localizado na documentação acessível</a:t>
+                        <a:t>-</a:t>
                       </a:r>
                     </a:p>
                   </a:txBody>
@@ -11098,194 +10922,7 @@
                           </a:solidFill>
                           <a:latin typeface="Calibri"/>
                         </a:rPr>
-                        <a:t>Não localizado na documentação acessível</a:t>
-                      </a:r>
-                    </a:p>
-                  </a:txBody>
-                  <a:tcPr marL="91440" marR="91440" marT="41148" marB="41148" anchor="ctr">
-                    <a:solidFill>
-                      <a:srgbClr val="FFFFFF"/>
-                    </a:solidFill>
-                    <a:lnL>
-                      <a:noFill/>
-                    </a:lnL>
-                    <a:lnR>
-                      <a:noFill/>
-                    </a:lnR>
-                    <a:lnT>
-                      <a:noFill/>
-                    </a:lnT>
-                    <a:lnB>
-                      <a:noFill/>
-                    </a:lnB>
-                  </a:tcPr>
-                </a:tc>
-              </a:tr>
-              <a:tr h="470916">
-                <a:tc>
-                  <a:txBody>
-                    <a:bodyPr wrap="square">
-                      <a:noAutofit/>
-                    </a:bodyPr>
-                    <a:lstStyle/>
-                    <a:p>
-                      <a:pPr algn="l">
-                        <a:lnSpc>
-                          <a:spcPct val="100000"/>
-                        </a:lnSpc>
-                        <a:spcBef>
-                          <a:spcPts val="0"/>
-                        </a:spcBef>
-                        <a:spcAft>
-                          <a:spcPts val="0"/>
-                        </a:spcAft>
-                      </a:pPr>
-                      <a:r>
-                        <a:rPr sz="1300" b="1">
-                          <a:solidFill>
-                            <a:srgbClr val="1F1F1F"/>
-                          </a:solidFill>
-                          <a:latin typeface="Calibri"/>
-                        </a:rPr>
-                        <a:t>Juros/amortização</a:t>
-                      </a:r>
-                    </a:p>
-                  </a:txBody>
-                  <a:tcPr marL="91440" marR="91440" marT="41148" marB="41148" anchor="ctr">
-                    <a:solidFill>
-                      <a:srgbClr val="FFFFFF"/>
-                    </a:solidFill>
-                    <a:lnL>
-                      <a:noFill/>
-                    </a:lnL>
-                    <a:lnR>
-                      <a:noFill/>
-                    </a:lnR>
-                    <a:lnT>
-                      <a:noFill/>
-                    </a:lnT>
-                    <a:lnB>
-                      <a:noFill/>
-                    </a:lnB>
-                  </a:tcPr>
-                </a:tc>
-                <a:tc>
-                  <a:txBody>
-                    <a:bodyPr wrap="square">
-                      <a:noAutofit/>
-                    </a:bodyPr>
-                    <a:lstStyle/>
-                    <a:p>
-                      <a:pPr algn="ctr">
-                        <a:lnSpc>
-                          <a:spcPct val="100000"/>
-                        </a:lnSpc>
-                        <a:spcBef>
-                          <a:spcPts val="0"/>
-                        </a:spcBef>
-                        <a:spcAft>
-                          <a:spcPts val="0"/>
-                        </a:spcAft>
-                      </a:pPr>
-                      <a:r>
-                        <a:rPr sz="1300" b="0">
-                          <a:solidFill>
-                            <a:srgbClr val="1F1F1F"/>
-                          </a:solidFill>
-                          <a:latin typeface="Calibri"/>
-                        </a:rPr>
-                        <a:t>Não localizado na documentação acessível; Não</a:t>
-                      </a:r>
-                    </a:p>
-                    <a:p>
-                      <a:pPr algn="ctr">
-                        <a:lnSpc>
-                          <a:spcPct val="100000"/>
-                        </a:lnSpc>
-                        <a:spcBef>
-                          <a:spcPts val="0"/>
-                        </a:spcBef>
-                        <a:spcAft>
-                          <a:spcPts val="0"/>
-                        </a:spcAft>
-                      </a:pPr>
-                      <a:r>
-                        <a:rPr sz="1300" b="0">
-                          <a:solidFill>
-                            <a:srgbClr val="1F1F1F"/>
-                          </a:solidFill>
-                          <a:latin typeface="Calibri"/>
-                        </a:rPr>
-                        <a:t>localizado na documentação acessível</a:t>
-                      </a:r>
-                    </a:p>
-                  </a:txBody>
-                  <a:tcPr marL="91440" marR="91440" marT="41148" marB="41148" anchor="ctr">
-                    <a:solidFill>
-                      <a:srgbClr val="FFFFFF"/>
-                    </a:solidFill>
-                    <a:lnL>
-                      <a:noFill/>
-                    </a:lnL>
-                    <a:lnR>
-                      <a:noFill/>
-                    </a:lnR>
-                    <a:lnT>
-                      <a:noFill/>
-                    </a:lnT>
-                    <a:lnB>
-                      <a:noFill/>
-                    </a:lnB>
-                  </a:tcPr>
-                </a:tc>
-                <a:tc>
-                  <a:txBody>
-                    <a:bodyPr wrap="square">
-                      <a:noAutofit/>
-                    </a:bodyPr>
-                    <a:lstStyle/>
-                    <a:p>
-                      <a:pPr algn="ctr">
-                        <a:lnSpc>
-                          <a:spcPct val="100000"/>
-                        </a:lnSpc>
-                        <a:spcBef>
-                          <a:spcPts val="0"/>
-                        </a:spcBef>
-                        <a:spcAft>
-                          <a:spcPts val="0"/>
-                        </a:spcAft>
-                      </a:pPr>
-                      <a:r>
-                        <a:rPr sz="1300" b="0">
-                          <a:solidFill>
-                            <a:srgbClr val="1F1F1F"/>
-                          </a:solidFill>
-                          <a:latin typeface="Calibri"/>
-                        </a:rPr>
-                        <a:t>Não localizado na documentação acessível; Não</a:t>
-                      </a:r>
-                    </a:p>
-                    <a:p>
-                      <a:pPr algn="ctr">
-                        <a:lnSpc>
-                          <a:spcPct val="100000"/>
-                        </a:lnSpc>
-                        <a:spcBef>
-                          <a:spcPts val="0"/>
-                        </a:spcBef>
-                        <a:spcAft>
-                          <a:spcPts val="0"/>
-                        </a:spcAft>
-                      </a:pPr>
-                      <a:r>
-                        <a:rPr sz="1300" b="0">
-                          <a:solidFill>
-                            <a:srgbClr val="1F1F1F"/>
-                          </a:solidFill>
-                          <a:latin typeface="Calibri"/>
-                        </a:rPr>
-                        <a:t>localizado na documentação acessível</a:t>
+                        <a:t>-</a:t>
                       </a:r>
                     </a:p>
                   </a:txBody>
@@ -11334,7 +10971,7 @@
                           </a:solidFill>
                           <a:latin typeface="Calibri"/>
                         </a:rPr>
-                        <a:t>Vencimento</a:t>
+                        <a:t>Juros/amortização</a:t>
                       </a:r>
                     </a:p>
                   </a:txBody>
@@ -11381,7 +11018,7 @@
                           </a:solidFill>
                           <a:latin typeface="Calibri"/>
                         </a:rPr>
-                        <a:t>Não localizado na documentação acessível</a:t>
+                        <a:t>-</a:t>
                       </a:r>
                     </a:p>
                   </a:txBody>
@@ -11428,7 +11065,7 @@
                           </a:solidFill>
                           <a:latin typeface="Calibri"/>
                         </a:rPr>
-                        <a:t>Não localizado na documentação acessível</a:t>
+                        <a:t>-</a:t>
                       </a:r>
                     </a:p>
                   </a:txBody>
@@ -11477,7 +11114,7 @@
                           </a:solidFill>
                           <a:latin typeface="Calibri"/>
                         </a:rPr>
-                        <a:t>Juros / pagamentos</a:t>
+                        <a:t>Vencimento</a:t>
                       </a:r>
                     </a:p>
                   </a:txBody>
@@ -11524,7 +11161,7 @@
                           </a:solidFill>
                           <a:latin typeface="Calibri"/>
                         </a:rPr>
-                        <a:t>Não localizado na documentação acessível</a:t>
+                        <a:t>-</a:t>
                       </a:r>
                     </a:p>
                   </a:txBody>
@@ -11571,7 +11208,7 @@
                           </a:solidFill>
                           <a:latin typeface="Calibri"/>
                         </a:rPr>
-                        <a:t>Não localizado na documentação acessível</a:t>
+                        <a:t>-</a:t>
                       </a:r>
                     </a:p>
                   </a:txBody>
@@ -11620,6 +11257,149 @@
                           </a:solidFill>
                           <a:latin typeface="Calibri"/>
                         </a:rPr>
+                        <a:t>Juros / pagamentos</a:t>
+                      </a:r>
+                    </a:p>
+                  </a:txBody>
+                  <a:tcPr marL="91440" marR="91440" marT="41148" marB="41148" anchor="ctr">
+                    <a:solidFill>
+                      <a:srgbClr val="FFFFFF"/>
+                    </a:solidFill>
+                    <a:lnL>
+                      <a:noFill/>
+                    </a:lnL>
+                    <a:lnR>
+                      <a:noFill/>
+                    </a:lnR>
+                    <a:lnT>
+                      <a:noFill/>
+                    </a:lnT>
+                    <a:lnB>
+                      <a:noFill/>
+                    </a:lnB>
+                  </a:tcPr>
+                </a:tc>
+                <a:tc>
+                  <a:txBody>
+                    <a:bodyPr wrap="square">
+                      <a:noAutofit/>
+                    </a:bodyPr>
+                    <a:lstStyle/>
+                    <a:p>
+                      <a:pPr algn="ctr">
+                        <a:lnSpc>
+                          <a:spcPct val="100000"/>
+                        </a:lnSpc>
+                        <a:spcBef>
+                          <a:spcPts val="0"/>
+                        </a:spcBef>
+                        <a:spcAft>
+                          <a:spcPts val="0"/>
+                        </a:spcAft>
+                      </a:pPr>
+                      <a:r>
+                        <a:rPr sz="1300" b="0">
+                          <a:solidFill>
+                            <a:srgbClr val="1F1F1F"/>
+                          </a:solidFill>
+                          <a:latin typeface="Calibri"/>
+                        </a:rPr>
+                        <a:t>-</a:t>
+                      </a:r>
+                    </a:p>
+                  </a:txBody>
+                  <a:tcPr marL="91440" marR="91440" marT="41148" marB="41148" anchor="ctr">
+                    <a:solidFill>
+                      <a:srgbClr val="FFFFFF"/>
+                    </a:solidFill>
+                    <a:lnL>
+                      <a:noFill/>
+                    </a:lnL>
+                    <a:lnR>
+                      <a:noFill/>
+                    </a:lnR>
+                    <a:lnT>
+                      <a:noFill/>
+                    </a:lnT>
+                    <a:lnB>
+                      <a:noFill/>
+                    </a:lnB>
+                  </a:tcPr>
+                </a:tc>
+                <a:tc>
+                  <a:txBody>
+                    <a:bodyPr wrap="square">
+                      <a:noAutofit/>
+                    </a:bodyPr>
+                    <a:lstStyle/>
+                    <a:p>
+                      <a:pPr algn="ctr">
+                        <a:lnSpc>
+                          <a:spcPct val="100000"/>
+                        </a:lnSpc>
+                        <a:spcBef>
+                          <a:spcPts val="0"/>
+                        </a:spcBef>
+                        <a:spcAft>
+                          <a:spcPts val="0"/>
+                        </a:spcAft>
+                      </a:pPr>
+                      <a:r>
+                        <a:rPr sz="1300" b="0">
+                          <a:solidFill>
+                            <a:srgbClr val="1F1F1F"/>
+                          </a:solidFill>
+                          <a:latin typeface="Calibri"/>
+                        </a:rPr>
+                        <a:t>-</a:t>
+                      </a:r>
+                    </a:p>
+                  </a:txBody>
+                  <a:tcPr marL="91440" marR="91440" marT="41148" marB="41148" anchor="ctr">
+                    <a:solidFill>
+                      <a:srgbClr val="FFFFFF"/>
+                    </a:solidFill>
+                    <a:lnL>
+                      <a:noFill/>
+                    </a:lnL>
+                    <a:lnR>
+                      <a:noFill/>
+                    </a:lnR>
+                    <a:lnT>
+                      <a:noFill/>
+                    </a:lnT>
+                    <a:lnB>
+                      <a:noFill/>
+                    </a:lnB>
+                  </a:tcPr>
+                </a:tc>
+              </a:tr>
+              <a:tr h="283464">
+                <a:tc>
+                  <a:txBody>
+                    <a:bodyPr wrap="square">
+                      <a:noAutofit/>
+                    </a:bodyPr>
+                    <a:lstStyle/>
+                    <a:p>
+                      <a:pPr algn="l">
+                        <a:lnSpc>
+                          <a:spcPct val="100000"/>
+                        </a:lnSpc>
+                        <a:spcBef>
+                          <a:spcPts val="0"/>
+                        </a:spcBef>
+                        <a:spcAft>
+                          <a:spcPts val="0"/>
+                        </a:spcAft>
+                      </a:pPr>
+                      <a:r>
+                        <a:rPr sz="1300" b="1">
+                          <a:solidFill>
+                            <a:srgbClr val="1F1F1F"/>
+                          </a:solidFill>
+                          <a:latin typeface="Calibri"/>
+                        </a:rPr>
                         <a:t>Amortização programada</a:t>
                       </a:r>
                     </a:p>
@@ -11667,7 +11447,7 @@
                           </a:solidFill>
                           <a:latin typeface="Calibri"/>
                         </a:rPr>
-                        <a:t>Não localizado na documentação acessível</a:t>
+                        <a:t>-</a:t>
                       </a:r>
                     </a:p>
                   </a:txBody>
@@ -11714,7 +11494,7 @@
                           </a:solidFill>
                           <a:latin typeface="Calibri"/>
                         </a:rPr>
-                        <a:t>Não localizado na documentação acessível</a:t>
+                        <a:t>-</a:t>
                       </a:r>
                     </a:p>
                   </a:txBody>
@@ -11834,7 +11614,7 @@
                           </a:solidFill>
                           <a:latin typeface="Calibri"/>
                         </a:rPr>
-                        <a:t>Não localizado na documentação acessível</a:t>
+                        <a:t>-</a:t>
                       </a:r>
                     </a:p>
                   </a:txBody>
@@ -11883,7 +11663,7 @@
                           </a:solidFill>
                           <a:latin typeface="Calibri"/>
                         </a:rPr>
-                        <a:t>Não localizado na documentação acessível</a:t>
+                        <a:t>-</a:t>
                       </a:r>
                     </a:p>
                   </a:txBody>
@@ -12088,7 +11868,7 @@
                       <a:r>
                         <a:rPr sz="1300" b="1">
                           <a:solidFill>
-                            <a:srgbClr val="1F1F1F"/>
+                            <a:srgbClr val="FFFFFF"/>
                           </a:solidFill>
                           <a:latin typeface="Calibri"/>
                         </a:rPr>
@@ -12098,7 +11878,7 @@
                   </a:txBody>
                   <a:tcPr marL="91440" marR="91440" marT="41148" marB="41148" anchor="ctr">
                     <a:solidFill>
-                      <a:srgbClr val="EC7000"/>
+                      <a:srgbClr val="FF6200"/>
                     </a:solidFill>
                     <a:lnL>
                       <a:noFill/>
@@ -12137,7 +11917,7 @@
                       <a:r>
                         <a:rPr sz="1300" b="1">
                           <a:solidFill>
-                            <a:srgbClr val="1F1F1F"/>
+                            <a:srgbClr val="FFFFFF"/>
                           </a:solidFill>
                           <a:latin typeface="Calibri"/>
                         </a:rPr>
@@ -12147,7 +11927,7 @@
                   </a:txBody>
                   <a:tcPr marL="91440" marR="91440" marT="41148" marB="41148" anchor="ctr">
                     <a:solidFill>
-                      <a:srgbClr val="EC7000"/>
+                      <a:srgbClr val="FF6200"/>
                     </a:solidFill>
                     <a:lnL>
                       <a:noFill/>
@@ -12186,7 +11966,7 @@
                       <a:r>
                         <a:rPr sz="1300" b="1">
                           <a:solidFill>
-                            <a:srgbClr val="1F1F1F"/>
+                            <a:srgbClr val="FFFFFF"/>
                           </a:solidFill>
                           <a:latin typeface="Calibri"/>
                         </a:rPr>
@@ -12196,7 +11976,7 @@
                   </a:txBody>
                   <a:tcPr marL="91440" marR="91440" marT="41148" marB="41148" anchor="ctr">
                     <a:solidFill>
-                      <a:srgbClr val="EC7000"/>
+                      <a:srgbClr val="FF6200"/>
                     </a:solidFill>
                     <a:lnL>
                       <a:noFill/>
@@ -12288,7 +12068,7 @@
                           </a:solidFill>
                           <a:latin typeface="Calibri"/>
                         </a:rPr>
-                        <a:t>Não localizado na documentação acessível</a:t>
+                        <a:t>-</a:t>
                       </a:r>
                     </a:p>
                   </a:txBody>
@@ -12335,7 +12115,7 @@
                           </a:solidFill>
                           <a:latin typeface="Calibri"/>
                         </a:rPr>
-                        <a:t>Não localizado na documentação acessível</a:t>
+                        <a:t>-</a:t>
                       </a:r>
                     </a:p>
                   </a:txBody>
@@ -12431,7 +12211,7 @@
                           </a:solidFill>
                           <a:latin typeface="Calibri"/>
                         </a:rPr>
-                        <a:t>Não localizado na documentação acessível</a:t>
+                        <a:t>-</a:t>
                       </a:r>
                     </a:p>
                   </a:txBody>
@@ -12478,7 +12258,7 @@
                           </a:solidFill>
                           <a:latin typeface="Calibri"/>
                         </a:rPr>
-                        <a:t>Não localizado na documentação acessível</a:t>
+                        <a:t>-</a:t>
                       </a:r>
                     </a:p>
                   </a:txBody>
@@ -12574,7 +12354,7 @@
                           </a:solidFill>
                           <a:latin typeface="Calibri"/>
                         </a:rPr>
-                        <a:t>Não localizado na documentação acessível</a:t>
+                        <a:t>-</a:t>
                       </a:r>
                     </a:p>
                   </a:txBody>
@@ -12621,7 +12401,7 @@
                           </a:solidFill>
                           <a:latin typeface="Calibri"/>
                         </a:rPr>
-                        <a:t>Não localizado na documentação acessível</a:t>
+                        <a:t>-</a:t>
                       </a:r>
                     </a:p>
                   </a:txBody>
@@ -12719,7 +12499,7 @@
                           </a:solidFill>
                           <a:latin typeface="Calibri"/>
                         </a:rPr>
-                        <a:t>Não localizado na documentação acessível</a:t>
+                        <a:t>-</a:t>
                       </a:r>
                     </a:p>
                   </a:txBody>
@@ -12768,7 +12548,7 @@
                           </a:solidFill>
                           <a:latin typeface="Calibri"/>
                         </a:rPr>
-                        <a:t>Não localizado na documentação acessível</a:t>
+                        <a:t>-</a:t>
                       </a:r>
                     </a:p>
                   </a:txBody>
@@ -12973,7 +12753,7 @@
                       <a:r>
                         <a:rPr sz="1300" b="1">
                           <a:solidFill>
-                            <a:srgbClr val="1F1F1F"/>
+                            <a:srgbClr val="FFFFFF"/>
                           </a:solidFill>
                           <a:latin typeface="Calibri"/>
                         </a:rPr>
@@ -12983,7 +12763,7 @@
                   </a:txBody>
                   <a:tcPr marL="91440" marR="91440" marT="41148" marB="41148" anchor="ctr">
                     <a:solidFill>
-                      <a:srgbClr val="EC7000"/>
+                      <a:srgbClr val="FF6200"/>
                     </a:solidFill>
                     <a:lnL>
                       <a:noFill/>
@@ -13022,7 +12802,7 @@
                       <a:r>
                         <a:rPr sz="1300" b="1">
                           <a:solidFill>
-                            <a:srgbClr val="1F1F1F"/>
+                            <a:srgbClr val="FFFFFF"/>
                           </a:solidFill>
                           <a:latin typeface="Calibri"/>
                         </a:rPr>
@@ -13032,7 +12812,7 @@
                   </a:txBody>
                   <a:tcPr marL="91440" marR="91440" marT="41148" marB="41148" anchor="ctr">
                     <a:solidFill>
-                      <a:srgbClr val="EC7000"/>
+                      <a:srgbClr val="FF6200"/>
                     </a:solidFill>
                     <a:lnL>
                       <a:noFill/>
@@ -13071,7 +12851,7 @@
                       <a:r>
                         <a:rPr sz="1300" b="1">
                           <a:solidFill>
-                            <a:srgbClr val="1F1F1F"/>
+                            <a:srgbClr val="FFFFFF"/>
                           </a:solidFill>
                           <a:latin typeface="Calibri"/>
                         </a:rPr>
@@ -13081,7 +12861,7 @@
                   </a:txBody>
                   <a:tcPr marL="91440" marR="91440" marT="41148" marB="41148" anchor="ctr">
                     <a:solidFill>
-                      <a:srgbClr val="EC7000"/>
+                      <a:srgbClr val="FF6200"/>
                     </a:solidFill>
                     <a:lnL>
                       <a:noFill/>
@@ -13195,9 +12975,34 @@
                           </a:solidFill>
                           <a:latin typeface="Calibri"/>
                         </a:rPr>
-                        <a:t>Não localizado na documentação acessível; Não</a:t>
-                      </a:r>
-                    </a:p>
+                        <a:t>-</a:t>
+                      </a:r>
+                    </a:p>
+                  </a:txBody>
+                  <a:tcPr marL="91440" marR="91440" marT="41148" marB="41148" anchor="ctr">
+                    <a:solidFill>
+                      <a:srgbClr val="FFFFFF"/>
+                    </a:solidFill>
+                    <a:lnL>
+                      <a:noFill/>
+                    </a:lnL>
+                    <a:lnR>
+                      <a:noFill/>
+                    </a:lnR>
+                    <a:lnT>
+                      <a:noFill/>
+                    </a:lnT>
+                    <a:lnB>
+                      <a:noFill/>
+                    </a:lnB>
+                  </a:tcPr>
+                </a:tc>
+                <a:tc>
+                  <a:txBody>
+                    <a:bodyPr wrap="square">
+                      <a:noAutofit/>
+                    </a:bodyPr>
+                    <a:lstStyle/>
                     <a:p>
                       <a:pPr algn="ctr">
                         <a:lnSpc>
@@ -13217,76 +13022,7 @@
                           </a:solidFill>
                           <a:latin typeface="Calibri"/>
                         </a:rPr>
-                        <a:t>localizado na documentação acessível</a:t>
-                      </a:r>
-                    </a:p>
-                  </a:txBody>
-                  <a:tcPr marL="91440" marR="91440" marT="41148" marB="41148" anchor="ctr">
-                    <a:solidFill>
-                      <a:srgbClr val="FFFFFF"/>
-                    </a:solidFill>
-                    <a:lnL>
-                      <a:noFill/>
-                    </a:lnL>
-                    <a:lnR>
-                      <a:noFill/>
-                    </a:lnR>
-                    <a:lnT>
-                      <a:noFill/>
-                    </a:lnT>
-                    <a:lnB>
-                      <a:noFill/>
-                    </a:lnB>
-                  </a:tcPr>
-                </a:tc>
-                <a:tc>
-                  <a:txBody>
-                    <a:bodyPr wrap="square">
-                      <a:noAutofit/>
-                    </a:bodyPr>
-                    <a:lstStyle/>
-                    <a:p>
-                      <a:pPr algn="ctr">
-                        <a:lnSpc>
-                          <a:spcPct val="100000"/>
-                        </a:lnSpc>
-                        <a:spcBef>
-                          <a:spcPts val="0"/>
-                        </a:spcBef>
-                        <a:spcAft>
-                          <a:spcPts val="0"/>
-                        </a:spcAft>
-                      </a:pPr>
-                      <a:r>
-                        <a:rPr sz="1300" b="0">
-                          <a:solidFill>
-                            <a:srgbClr val="1F1F1F"/>
-                          </a:solidFill>
-                          <a:latin typeface="Calibri"/>
-                        </a:rPr>
-                        <a:t>Não localizado na documentação acessível; Não</a:t>
-                      </a:r>
-                    </a:p>
-                    <a:p>
-                      <a:pPr algn="ctr">
-                        <a:lnSpc>
-                          <a:spcPct val="100000"/>
-                        </a:lnSpc>
-                        <a:spcBef>
-                          <a:spcPts val="0"/>
-                        </a:spcBef>
-                        <a:spcAft>
-                          <a:spcPts val="0"/>
-                        </a:spcAft>
-                      </a:pPr>
-                      <a:r>
-                        <a:rPr sz="1300" b="0">
-                          <a:solidFill>
-                            <a:srgbClr val="1F1F1F"/>
-                          </a:solidFill>
-                          <a:latin typeface="Calibri"/>
-                        </a:rPr>
-                        <a:t>localizado na documentação acessível</a:t>
+                        <a:t>-</a:t>
                       </a:r>
                     </a:p>
                   </a:txBody>
@@ -13382,7 +13118,7 @@
                           </a:solidFill>
                           <a:latin typeface="Calibri"/>
                         </a:rPr>
-                        <a:t>Não localizado na documentação acessível</a:t>
+                        <a:t>-</a:t>
                       </a:r>
                     </a:p>
                   </a:txBody>
@@ -13429,7 +13165,7 @@
                           </a:solidFill>
                           <a:latin typeface="Calibri"/>
                         </a:rPr>
-                        <a:t>Não localizado na documentação acessível</a:t>
+                        <a:t>-</a:t>
                       </a:r>
                     </a:p>
                   </a:txBody>
@@ -13525,7 +13261,7 @@
                           </a:solidFill>
                           <a:latin typeface="Calibri"/>
                         </a:rPr>
-                        <a:t>Não localizado na documentação acessível</a:t>
+                        <a:t>-</a:t>
                       </a:r>
                     </a:p>
                   </a:txBody>
@@ -13572,7 +13308,7 @@
                           </a:solidFill>
                           <a:latin typeface="Calibri"/>
                         </a:rPr>
-                        <a:t>Não localizado na documentação acessível</a:t>
+                        <a:t>-</a:t>
                       </a:r>
                     </a:p>
                   </a:txBody>
@@ -13855,7 +13591,7 @@
                           </a:solidFill>
                           <a:latin typeface="Calibri"/>
                         </a:rPr>
-                        <a:t>Não localizado na documentação acessível</a:t>
+                        <a:t>-</a:t>
                       </a:r>
                     </a:p>
                   </a:txBody>
@@ -13902,7 +13638,7 @@
                           </a:solidFill>
                           <a:latin typeface="Calibri"/>
                         </a:rPr>
-                        <a:t>Não localizado na documentação acessível</a:t>
+                        <a:t>-</a:t>
                       </a:r>
                     </a:p>
                   </a:txBody>
@@ -13998,7 +13734,7 @@
                           </a:solidFill>
                           <a:latin typeface="Calibri"/>
                         </a:rPr>
-                        <a:t>Não localizado na documentação acessível</a:t>
+                        <a:t>-</a:t>
                       </a:r>
                     </a:p>
                   </a:txBody>
@@ -14045,7 +13781,7 @@
                           </a:solidFill>
                           <a:latin typeface="Calibri"/>
                         </a:rPr>
-                        <a:t>Não localizado na documentação acessível</a:t>
+                        <a:t>-</a:t>
                       </a:r>
                     </a:p>
                   </a:txBody>
@@ -14163,7 +13899,7 @@
                           </a:solidFill>
                           <a:latin typeface="Calibri"/>
                         </a:rPr>
-                        <a:t>Não localizado na documentação acessível</a:t>
+                        <a:t>-</a:t>
                       </a:r>
                     </a:p>
                   </a:txBody>
@@ -14210,7 +13946,7 @@
                           </a:solidFill>
                           <a:latin typeface="Calibri"/>
                         </a:rPr>
-                        <a:t>Não localizado na documentação acessível</a:t>
+                        <a:t>-</a:t>
                       </a:r>
                     </a:p>
                   </a:txBody>
@@ -14306,7 +14042,7 @@
                           </a:solidFill>
                           <a:latin typeface="Calibri"/>
                         </a:rPr>
-                        <a:t>Não localizado na documentação acessível</a:t>
+                        <a:t>-</a:t>
                       </a:r>
                     </a:p>
                   </a:txBody>
@@ -14353,7 +14089,7 @@
                           </a:solidFill>
                           <a:latin typeface="Calibri"/>
                         </a:rPr>
-                        <a:t>Não localizado na documentação acessível</a:t>
+                        <a:t>-</a:t>
                       </a:r>
                     </a:p>
                   </a:txBody>
@@ -14451,7 +14187,7 @@
                           </a:solidFill>
                           <a:latin typeface="Calibri"/>
                         </a:rPr>
-                        <a:t>Não localizado na documentação acessível</a:t>
+                        <a:t>-</a:t>
                       </a:r>
                     </a:p>
                   </a:txBody>
@@ -14500,7 +14236,7 @@
                           </a:solidFill>
                           <a:latin typeface="Calibri"/>
                         </a:rPr>
-                        <a:t>Não localizado na documentação acessível</a:t>
+                        <a:t>-</a:t>
                       </a:r>
                     </a:p>
                   </a:txBody>
